--- a/materials/pdf/original/DS02_Folien_Was-macht-dieser-Automat.pptx
+++ b/materials/pdf/original/DS02_Folien_Was-macht-dieser-Automat.pptx
@@ -126,12 +126,12 @@
   <p:extLst>
     <p:ext uri="{521415D9-36F7-43E2-AB2F-B90AF26B5E84}">
       <p14:sectionLst xmlns:p14="http://schemas.microsoft.com/office/powerpoint/2010/main">
-        <p14:section name="Start" id="{538a63ae-c1e3-1c63-6c01-201c86064c85}">
+        <p14:section name="Start" id="{c3b48c3b-232f-8e7b-77d4-a78779f91841}">
           <p14:sldIdLst>
             <p14:sldId id="256"/>
           </p14:sldIdLst>
         </p14:section>
-        <p14:section name="Einstieg" id="{9377166b-c8de-2cce-a136-39d9dd75d5ee}">
+        <p14:section name="Einstieg" id="{151208a7-7387-7a3c-44e2-ed25ebb397b8}">
           <p14:sldIdLst>
             <p14:sldId id="257"/>
             <p14:sldId id="258"/>
@@ -140,7 +140,7 @@
             <p14:sldId id="261"/>
           </p14:sldIdLst>
         </p14:section>
-        <p14:section name="Erarbeitung" id="{c8214b28-4eed-4626-b0ec-75c7ed8beecd}">
+        <p14:section name="Erarbeitung" id="{70d32d73-af1a-1c5f-9181-52966880173a}">
           <p14:sldIdLst>
             <p14:sldId id="262"/>
             <p14:sldId id="263"/>
@@ -151,7 +151,7 @@
             <p14:sldId id="268"/>
           </p14:sldIdLst>
         </p14:section>
-        <p14:section name="Übung" id="{aed836d8-9298-77b9-6ecd-ee4253209028}">
+        <p14:section name="Übung" id="{5973f17e-3dd3-e83c-fb75-c32e2615c6d3}">
           <p14:sldIdLst>
             <p14:sldId id="269"/>
             <p14:sldId id="270"/>
@@ -159,13 +159,13 @@
             <p14:sldId id="272"/>
           </p14:sldIdLst>
         </p14:section>
-        <p14:section name="Sicherung" id="{17638968-29e7-4aa0-df20-657657eec523}">
+        <p14:section name="Sicherung" id="{a30cf3cc-ba85-5506-a084-de49ca88b700}">
           <p14:sldIdLst>
             <p14:sldId id="273"/>
             <p14:sldId id="274"/>
           </p14:sldIdLst>
         </p14:section>
-        <p14:section name="Abschluss" id="{53deb824-3cee-e50e-aaa1-6f9d6763a2e9}">
+        <p14:section name="Abschluss" id="{ab9c786e-e7b3-a040-2002-3683d7176d86}">
           <p14:sldIdLst>
             <p14:sldId id="275"/>
           </p14:sldIdLst>
@@ -2573,6 +2573,45 @@
       </p:sp>
       <p:sp>
         <p:nvSpPr>
+          <p:cNvPr id="4" name="Text 1"/>
+          <p:cNvSpPr/>
+          <p:nvPr/>
+        </p:nvSpPr>
+        <p:spPr>
+          <a:xfrm>
+            <a:off x="7985455" y="6473952"/>
+            <a:ext cx="2926080" cy="274320"/>
+          </a:xfrm>
+          <a:prstGeom prst="rect">
+            <a:avLst/>
+          </a:prstGeom>
+          <a:noFill/>
+          <a:ln/>
+        </p:spPr>
+        <p:txBody>
+          <a:bodyPr wrap="square" lIns="0" tIns="0" rIns="0" bIns="0" rtlCol="0" anchor="ctr"/>
+          <a:lstStyle/>
+          <a:p>
+            <a:pPr algn="r" indent="0" marL="0">
+              <a:buNone/>
+            </a:pPr>
+            <a:r>
+              <a:rPr lang="en-US" sz="1100" dirty="0">
+                <a:solidFill>
+                  <a:srgbClr val="5B6770"/>
+                </a:solidFill>
+                <a:latin typeface="Calibri" pitchFamily="34" charset="0"/>
+                <a:ea typeface="Calibri" pitchFamily="34" charset="-122"/>
+                <a:cs typeface="Calibri" pitchFamily="34" charset="-120"/>
+              </a:rPr>
+              <a:t>CC BY-SA 4.0 · Frank Juchim</a:t>
+            </a:r>
+            <a:endParaRPr lang="en-US" sz="1100" dirty="0"/>
+          </a:p>
+        </p:txBody>
+      </p:sp>
+      <p:sp>
+        <p:nvSpPr>
           <p:cNvPr id="25" name="Slide Number Placeholder 0"/>
           <p:cNvSpPr>
             <a:spLocks noGrp="1"/>
@@ -2724,6 +2763,45 @@
                 <a:cs typeface="Calibri" pitchFamily="34" charset="-120"/>
               </a:rPr>
               <a:t>Level 2 · Welt A · Endliche Automaten · gA und eA</a:t>
+            </a:r>
+            <a:endParaRPr lang="en-US" sz="1100" dirty="0"/>
+          </a:p>
+        </p:txBody>
+      </p:sp>
+      <p:sp>
+        <p:nvSpPr>
+          <p:cNvPr id="4" name="Text 1"/>
+          <p:cNvSpPr/>
+          <p:nvPr/>
+        </p:nvSpPr>
+        <p:spPr>
+          <a:xfrm>
+            <a:off x="7985455" y="6473952"/>
+            <a:ext cx="2926080" cy="274320"/>
+          </a:xfrm>
+          <a:prstGeom prst="rect">
+            <a:avLst/>
+          </a:prstGeom>
+          <a:noFill/>
+          <a:ln/>
+        </p:spPr>
+        <p:txBody>
+          <a:bodyPr wrap="square" lIns="0" tIns="0" rIns="0" bIns="0" rtlCol="0" anchor="ctr"/>
+          <a:lstStyle/>
+          <a:p>
+            <a:pPr algn="r" indent="0" marL="0">
+              <a:buNone/>
+            </a:pPr>
+            <a:r>
+              <a:rPr lang="en-US" sz="1100" dirty="0">
+                <a:solidFill>
+                  <a:srgbClr val="5B6770"/>
+                </a:solidFill>
+                <a:latin typeface="Calibri" pitchFamily="34" charset="0"/>
+                <a:ea typeface="Calibri" pitchFamily="34" charset="-122"/>
+                <a:cs typeface="Calibri" pitchFamily="34" charset="-120"/>
+              </a:rPr>
+              <a:t>CC BY-SA 4.0 · Frank Juchim</a:t>
             </a:r>
             <a:endParaRPr lang="en-US" sz="1100" dirty="0"/>
           </a:p>
